--- a/curso/pptx/S46.pptx
+++ b/curso/pptx/S46.pptx
@@ -6979,7 +6979,7 @@
                 </a:solidFill>
                 <a:latin typeface="Nunito Sans"/>
               </a:rPr>
-              <a:t>Ancla:</a:t>
+              <a:t>锚：</a:t>
             </a:r>
             <a:r>
               <a:rPr sz="2800" b="0">
@@ -6988,7 +6988,7 @@
                 </a:solidFill>
                 <a:latin typeface="Nunito Sans"/>
               </a:rPr>
-              <a:t> el hierro que sujeta un barco al fondo</a:t>
+              <a:t>把船固定在水底的铁器</a:t>
             </a:r>
           </a:p>
           <a:p>
@@ -7013,7 +7013,7 @@
                 </a:solidFill>
                 <a:latin typeface="Nunito Sans"/>
               </a:rPr>
-              <a:t>El primer precio hace que el segundo parezca barato o caro</a:t>
+              <a:t>第一个价格会让第二个价格显得便宜或贵</a:t>
             </a:r>
           </a:p>
           <a:p>
@@ -7038,7 +7038,7 @@
                 </a:solidFill>
                 <a:latin typeface="Nunito Sans"/>
               </a:rPr>
-              <a:t>Funciona incluso si el primer número sale al azar</a:t>
+              <a:t>即使第一个数字是随便得来的，它也起作用</a:t>
             </a:r>
           </a:p>
           <a:p>
@@ -7063,7 +7063,7 @@
                 </a:solidFill>
                 <a:latin typeface="Nunito Sans"/>
               </a:rPr>
-              <a:t>Ojo si el número no viene a cuento o es inventado</a:t>
+              <a:t>如果这个数字不相关，或者是编造的，就要小心</a:t>
             </a:r>
           </a:p>
         </p:txBody>
@@ -7297,7 +7297,7 @@
                 </a:solidFill>
                 <a:latin typeface="Nunito Sans"/>
               </a:rPr>
-              <a:t>Encuadre:</a:t>
+              <a:t>框架：</a:t>
             </a:r>
             <a:r>
               <a:rPr sz="2800" b="0">
@@ -7306,7 +7306,7 @@
                 </a:solidFill>
                 <a:latin typeface="Nunito Sans"/>
               </a:rPr>
-              <a:t> el marco, como el de una foto</a:t>
+              <a:t>相框，就像照片的框</a:t>
             </a:r>
           </a:p>
           <a:p>
@@ -7331,7 +7331,7 @@
                 </a:solidFill>
                 <a:latin typeface="Nunito Sans"/>
               </a:rPr>
-              <a:t>«90 % sobreviven» y «10 % mueren» dicen lo mismo</a:t>
+              <a:t>“90 %活下来”和“10 %死亡”说的是同一件事</a:t>
             </a:r>
           </a:p>
           <a:p>
@@ -7356,7 +7356,7 @@
                 </a:solidFill>
                 <a:latin typeface="Nunito Sans"/>
               </a:rPr>
-              <a:t>Pero con la primera frase más gente elige operarse</a:t>
+              <a:t>但第一种说法让更多的人选择做手术</a:t>
             </a:r>
           </a:p>
         </p:txBody>

--- a/curso/pptx/S46.pptx
+++ b/curso/pptx/S46.pptx
@@ -5055,7 +5055,7 @@
                 </a:solidFill>
                 <a:latin typeface="Nunito Sans"/>
               </a:rPr>
-              <a:t>Chen想卖他的二手自行车。定价之前，他在网上看同样的自行车卖多少钱：大约150 €。他定价140 €。</a:t>
+              <a:t>一个男孩想卖他的二手自行车。定价之前，他在网上看同样的自行车卖多少钱：大约150 €。他定价140 €。</a:t>
             </a:r>
           </a:p>
         </p:txBody>
